--- a/builder/assets/reference-pages/stage-process.pptx
+++ b/builder/assets/reference-pages/stage-process.pptx
@@ -1097,7 +1097,7 @@
                   <a:srgbClr val="172033"/>
                 </a:solidFill>
               </a:rPr>
-              <a:t>三阶段推进可在十二个月内完成转型</a:t>
+              <a:t>Three-stage advancement can complete the transformation within twelve months</a:t>
             </a:r>
           </a:p>
         </p:txBody>
@@ -1308,7 +1308,7 @@
                   <a:srgbClr val="172033"/>
                 </a:solidFill>
               </a:rPr>
-              <a:t>跟踪风险</a:t>
+              <a:t>Track risks</a:t>
             </a:r>
           </a:p>
         </p:txBody>
@@ -1358,7 +1358,7 @@
                   <a:srgbClr val="172033"/>
                 </a:solidFill>
               </a:rPr>
-              <a:t>资源</a:t>
+              <a:t>Resources</a:t>
             </a:r>
           </a:p>
         </p:txBody>
@@ -1408,7 +1408,7 @@
                   <a:srgbClr val="172033"/>
                 </a:solidFill>
               </a:rPr>
-              <a:t>量化指标</a:t>
+              <a:t>Quantitative indicators</a:t>
             </a:r>
           </a:p>
         </p:txBody>
@@ -1458,7 +1458,7 @@
                   <a:srgbClr val="FFFFFF"/>
                 </a:solidFill>
               </a:rPr>
-              <a:t>诊断</a:t>
+              <a:t>Diagnosis</a:t>
             </a:r>
           </a:p>
         </p:txBody>
@@ -1512,7 +1512,7 @@
                   <a:srgbClr val="172033"/>
                 </a:solidFill>
               </a:rPr>
-              <a:t>诊断现状</a:t>
+              <a:t>Diagnosis status</a:t>
             </a:r>
           </a:p>
           <a:p xmlns:a="http://schemas.openxmlformats.org/drawingml/2006/main">
@@ -1529,7 +1529,7 @@
                   <a:srgbClr val="172033"/>
                 </a:solidFill>
               </a:rPr>
-              <a:t>• 形成问题清单</a:t>
+              <a:t>• Create a list of questions</a:t>
             </a:r>
           </a:p>
           <a:p xmlns:a="http://schemas.openxmlformats.org/drawingml/2006/main">
@@ -1546,7 +1546,7 @@
                   <a:srgbClr val="172033"/>
                 </a:solidFill>
               </a:rPr>
-              <a:t>一至三月</a:t>
+              <a:t>January to March</a:t>
             </a:r>
           </a:p>
         </p:txBody>
@@ -1596,7 +1596,7 @@
                   <a:srgbClr val="FFFFFF"/>
                 </a:solidFill>
               </a:rPr>
-              <a:t>试点</a:t>
+              <a:t>pilot</a:t>
             </a:r>
           </a:p>
         </p:txBody>
@@ -1650,7 +1650,7 @@
                   <a:srgbClr val="172033"/>
                 </a:solidFill>
               </a:rPr>
-              <a:t>验证核心流程</a:t>
+              <a:t>Verify core process</a:t>
             </a:r>
           </a:p>
           <a:p xmlns:a="http://schemas.openxmlformats.org/drawingml/2006/main">
@@ -1667,7 +1667,7 @@
                   <a:srgbClr val="172033"/>
                 </a:solidFill>
               </a:rPr>
-              <a:t>试点报告</a:t>
+              <a:t>Pilot report</a:t>
             </a:r>
           </a:p>
           <a:p xmlns:a="http://schemas.openxmlformats.org/drawingml/2006/main">
@@ -1684,7 +1684,7 @@
                   <a:srgbClr val="172033"/>
                 </a:solidFill>
               </a:rPr>
-              <a:t>四至八月</a:t>
+              <a:t>April to August</a:t>
             </a:r>
           </a:p>
         </p:txBody>
@@ -1734,7 +1734,7 @@
                   <a:srgbClr val="FFFFFF"/>
                 </a:solidFill>
               </a:rPr>
-              <a:t>推广</a:t>
+              <a:t>promotion</a:t>
             </a:r>
           </a:p>
         </p:txBody>
@@ -1788,7 +1788,7 @@
                   <a:srgbClr val="172033"/>
                 </a:solidFill>
               </a:rPr>
-              <a:t>完成制度固化</a:t>
+              <a:t>Complete system solidification</a:t>
             </a:r>
           </a:p>
           <a:p xmlns:a="http://schemas.openxmlformats.org/drawingml/2006/main">
@@ -1805,7 +1805,7 @@
                   <a:srgbClr val="172033"/>
                 </a:solidFill>
               </a:rPr>
-              <a:t>• 全员上线</a:t>
+              <a:t>• All members are online</a:t>
             </a:r>
           </a:p>
           <a:p xmlns:a="http://schemas.openxmlformats.org/drawingml/2006/main">
@@ -1822,7 +1822,7 @@
                   <a:srgbClr val="172033"/>
                 </a:solidFill>
               </a:rPr>
-              <a:t>九至十二月</a:t>
+              <a:t>September to December</a:t>
             </a:r>
           </a:p>
         </p:txBody>
